--- a/classes/parte-2-deep-learning/143-transformers-arquitectura-bert-gpt/clase-143-transformers-arquitectura-bert-gpt-presentacion.pptx
+++ b/classes/parte-2-deep-learning/143-transformers-arquitectura-bert-gpt/clase-143-transformers-arquitectura-bert-gpt-presentacion.pptx
@@ -4910,7 +4910,273 @@
                 </a:solidFill>
                 <a:latin typeface="Courier New"/>
               </a:rPr>
-              <a:t># Imports y configuración inicial</a:t>
+              <a:t>import numpy as np</a:t>
+            </a:r>
+          </a:p>
+          <a:p>
+            <a:pPr>
+              <a:defRPr sz="1200" b="0">
+                <a:solidFill>
+                  <a:srgbClr val="F8FAFC"/>
+                </a:solidFill>
+                <a:latin typeface="Courier New"/>
+              </a:defRPr>
+            </a:pPr>
+            <a:r>
+              <a:rPr sz="1200" b="0">
+                <a:solidFill>
+                  <a:srgbClr val="F8FAFC"/>
+                </a:solidFill>
+                <a:latin typeface="Courier New"/>
+              </a:rPr>
+              <a:t>from tensorflow import keras</a:t>
+            </a:r>
+          </a:p>
+          <a:p>
+            <a:pPr>
+              <a:defRPr sz="1200" b="0">
+                <a:solidFill>
+                  <a:srgbClr val="F8FAFC"/>
+                </a:solidFill>
+                <a:latin typeface="Courier New"/>
+              </a:defRPr>
+            </a:pPr>
+            <a:r>
+              <a:rPr sz="1200" b="0">
+                <a:solidFill>
+                  <a:srgbClr val="F8FAFC"/>
+                </a:solidFill>
+                <a:latin typeface="Courier New"/>
+              </a:rPr>
+              <a:t>from tensorflow.keras import layers</a:t>
+            </a:r>
+          </a:p>
+          <a:p>
+            <a:pPr>
+              <a:defRPr sz="1200" b="0">
+                <a:solidFill>
+                  <a:srgbClr val="F8FAFC"/>
+                </a:solidFill>
+                <a:latin typeface="Courier New"/>
+              </a:defRPr>
+            </a:pPr>
+            <a:r>
+              <a:rPr sz="1200" b="0">
+                <a:solidFill>
+                  <a:srgbClr val="F8FAFC"/>
+                </a:solidFill>
+                <a:latin typeface="Courier New"/>
+              </a:rPr>
+              <a:t>keras.utils.set_random_seed(42)</a:t>
+            </a:r>
+          </a:p>
+          <a:p>
+            <a:pPr>
+              <a:defRPr sz="1200" b="0">
+                <a:solidFill>
+                  <a:srgbClr val="F8FAFC"/>
+                </a:solidFill>
+                <a:latin typeface="Courier New"/>
+              </a:defRPr>
+            </a:pPr>
+            <a:r>
+              <a:rPr sz="1200" b="0">
+                <a:solidFill>
+                  <a:srgbClr val="F8FAFC"/>
+                </a:solidFill>
+                <a:latin typeface="Courier New"/>
+              </a:rPr>
+              <a:t>def positional_encoding(seq_len, d_model):</a:t>
+            </a:r>
+          </a:p>
+          <a:p>
+            <a:pPr>
+              <a:defRPr sz="1200" b="0">
+                <a:solidFill>
+                  <a:srgbClr val="F8FAFC"/>
+                </a:solidFill>
+                <a:latin typeface="Courier New"/>
+              </a:defRPr>
+            </a:pPr>
+            <a:r>
+              <a:rPr sz="1200" b="0">
+                <a:solidFill>
+                  <a:srgbClr val="F8FAFC"/>
+                </a:solidFill>
+                <a:latin typeface="Courier New"/>
+              </a:rPr>
+              <a:t>    pos = np.arange(seq_len)[:, None]</a:t>
+            </a:r>
+          </a:p>
+          <a:p>
+            <a:pPr>
+              <a:defRPr sz="1200" b="0">
+                <a:solidFill>
+                  <a:srgbClr val="F8FAFC"/>
+                </a:solidFill>
+                <a:latin typeface="Courier New"/>
+              </a:defRPr>
+            </a:pPr>
+            <a:r>
+              <a:rPr sz="1200" b="0">
+                <a:solidFill>
+                  <a:srgbClr val="F8FAFC"/>
+                </a:solidFill>
+                <a:latin typeface="Courier New"/>
+              </a:rPr>
+              <a:t>    i = np.arange(d_model)[None, :]</a:t>
+            </a:r>
+          </a:p>
+          <a:p>
+            <a:pPr>
+              <a:defRPr sz="1200" b="0">
+                <a:solidFill>
+                  <a:srgbClr val="F8FAFC"/>
+                </a:solidFill>
+                <a:latin typeface="Courier New"/>
+              </a:defRPr>
+            </a:pPr>
+            <a:r>
+              <a:rPr sz="1200" b="0">
+                <a:solidFill>
+                  <a:srgbClr val="F8FAFC"/>
+                </a:solidFill>
+                <a:latin typeface="Courier New"/>
+              </a:rPr>
+              <a:t>    ang = pos / np.power(10000.0, (2 * (i // 2)) / d_model)</a:t>
+            </a:r>
+          </a:p>
+          <a:p>
+            <a:pPr>
+              <a:defRPr sz="1200" b="0">
+                <a:solidFill>
+                  <a:srgbClr val="F8FAFC"/>
+                </a:solidFill>
+                <a:latin typeface="Courier New"/>
+              </a:defRPr>
+            </a:pPr>
+            <a:r>
+              <a:rPr sz="1200" b="0">
+                <a:solidFill>
+                  <a:srgbClr val="F8FAFC"/>
+                </a:solidFill>
+                <a:latin typeface="Courier New"/>
+              </a:rPr>
+              <a:t>    pe = np.zeros((seq_len, d_model))</a:t>
+            </a:r>
+          </a:p>
+          <a:p>
+            <a:pPr>
+              <a:defRPr sz="1200" b="0">
+                <a:solidFill>
+                  <a:srgbClr val="F8FAFC"/>
+                </a:solidFill>
+                <a:latin typeface="Courier New"/>
+              </a:defRPr>
+            </a:pPr>
+            <a:r>
+              <a:rPr sz="1200" b="0">
+                <a:solidFill>
+                  <a:srgbClr val="F8FAFC"/>
+                </a:solidFill>
+                <a:latin typeface="Courier New"/>
+              </a:rPr>
+              <a:t>    pe[:, 0::2] = np.sin(ang[:, 0::2])   # dimensiones pares -&gt; seno</a:t>
+            </a:r>
+          </a:p>
+          <a:p>
+            <a:pPr>
+              <a:defRPr sz="1200" b="0">
+                <a:solidFill>
+                  <a:srgbClr val="F8FAFC"/>
+                </a:solidFill>
+                <a:latin typeface="Courier New"/>
+              </a:defRPr>
+            </a:pPr>
+            <a:r>
+              <a:rPr sz="1200" b="0">
+                <a:solidFill>
+                  <a:srgbClr val="F8FAFC"/>
+                </a:solidFill>
+                <a:latin typeface="Courier New"/>
+              </a:rPr>
+              <a:t>    pe[:, 1::2] = np.cos(ang[:, 1::2])   # dimensiones impares -&gt; coseno</a:t>
+            </a:r>
+          </a:p>
+          <a:p>
+            <a:pPr>
+              <a:defRPr sz="1200" b="0">
+                <a:solidFill>
+                  <a:srgbClr val="F8FAFC"/>
+                </a:solidFill>
+                <a:latin typeface="Courier New"/>
+              </a:defRPr>
+            </a:pPr>
+            <a:r>
+              <a:rPr sz="1200" b="0">
+                <a:solidFill>
+                  <a:srgbClr val="F8FAFC"/>
+                </a:solidFill>
+                <a:latin typeface="Courier New"/>
+              </a:rPr>
+              <a:t>    return pe</a:t>
+            </a:r>
+          </a:p>
+          <a:p>
+            <a:pPr>
+              <a:defRPr sz="1200" b="0">
+                <a:solidFill>
+                  <a:srgbClr val="F8FAFC"/>
+                </a:solidFill>
+                <a:latin typeface="Courier New"/>
+              </a:defRPr>
+            </a:pPr>
+            <a:r>
+              <a:rPr sz="1200" b="0">
+                <a:solidFill>
+                  <a:srgbClr val="F8FAFC"/>
+                </a:solidFill>
+                <a:latin typeface="Courier New"/>
+              </a:rPr>
+              <a:t> </a:t>
+            </a:r>
+          </a:p>
+          <a:p>
+            <a:pPr>
+              <a:defRPr sz="1200" b="0">
+                <a:solidFill>
+                  <a:srgbClr val="F8FAFC"/>
+                </a:solidFill>
+                <a:latin typeface="Courier New"/>
+              </a:defRPr>
+            </a:pPr>
+            <a:r>
+              <a:rPr sz="1200" b="0">
+                <a:solidFill>
+                  <a:srgbClr val="F8FAFC"/>
+                </a:solidFill>
+                <a:latin typeface="Courier New"/>
+              </a:rPr>
+              <a:t>pe = positional_encoding(50, 64)</a:t>
+            </a:r>
+          </a:p>
+          <a:p>
+            <a:pPr>
+              <a:defRPr sz="1200" b="0">
+                <a:solidFill>
+                  <a:srgbClr val="F8FAFC"/>
+                </a:solidFill>
+                <a:latin typeface="Courier New"/>
+              </a:defRPr>
+            </a:pPr>
+            <a:r>
+              <a:rPr sz="1200" b="0">
+                <a:solidFill>
+                  <a:srgbClr val="F8FAFC"/>
+                </a:solidFill>
+                <a:latin typeface="Courier New"/>
+              </a:rPr>
+              <a:t>print("positional encoding:", pe.shape, "| rango:", round(pe.min(), 2), round(pe.max(), 2))</a:t>
             </a:r>
           </a:p>
         </p:txBody>

--- a/classes/parte-2-deep-learning/143-transformers-arquitectura-bert-gpt/clase-143-transformers-arquitectura-bert-gpt-presentacion.pptx
+++ b/classes/parte-2-deep-learning/143-transformers-arquitectura-bert-gpt/clase-143-transformers-arquitectura-bert-gpt-presentacion.pptx
@@ -3272,7 +3272,7 @@
                 </a:solidFill>
                 <a:latin typeface="Segoe UI"/>
               </a:rPr>
-              <a:t>Parte: 2 — Deep Learning · Fuente: Géron, cap. 16 § The Transformer Architecture + Vaswani et al. (2017) + papers BERT, GPT, FlashAttention.  Duración estimada: 100 min.</a:t>
+              <a:t>Parte: 2 — Deep Learning · Fuente: Géron, cap. 16 § The Transformer Architecture + Vaswani et al. (2017) + papers BERT, GPT, FlashAttention.  Duración estimada: 100 min. · Nivel: Avanzado</a:t>
             </a:r>
           </a:p>
         </p:txBody>
@@ -3581,7 +3581,7 @@
                 </a:solidFill>
                 <a:latin typeface="Segoe UI"/>
               </a:rPr>
-              <a:t>Parte: 2 — Deep Learning · Fuente: Géron, cap. 16 § The Transformer Architecture + Vaswani et al. (2017) + papers BERT, GPT, FlashAttention.  Duración estimada: 100 min.</a:t>
+              <a:t>Parte: 2 — Deep Learning · Fuente: Géron, cap. 16 § The Transformer Architecture + Vaswani et al. (2017) + papers BERT, GPT, FlashAttention.  Duración estimada: 100 min. · Nivel: Avanzado</a:t>
             </a:r>
           </a:p>
         </p:txBody>
